--- a/building corporate culture.pptx
+++ b/building corporate culture.pptx
@@ -6,9 +6,20 @@
   </p:sldMasterIdLst>
   <p:sldIdLst>
     <p:sldId id="258" r:id="rId2"/>
-    <p:sldId id="256" r:id="rId3"/>
-    <p:sldId id="257" r:id="rId4"/>
-    <p:sldId id="259" r:id="rId5"/>
+    <p:sldId id="259" r:id="rId3"/>
+    <p:sldId id="260" r:id="rId4"/>
+    <p:sldId id="261" r:id="rId5"/>
+    <p:sldId id="262" r:id="rId6"/>
+    <p:sldId id="263" r:id="rId7"/>
+    <p:sldId id="264" r:id="rId8"/>
+    <p:sldId id="265" r:id="rId9"/>
+    <p:sldId id="266" r:id="rId10"/>
+    <p:sldId id="267" r:id="rId11"/>
+    <p:sldId id="268" r:id="rId12"/>
+    <p:sldId id="269" r:id="rId13"/>
+    <p:sldId id="271" r:id="rId14"/>
+    <p:sldId id="272" r:id="rId15"/>
+    <p:sldId id="270" r:id="rId16"/>
   </p:sldIdLst>
   <p:sldSz cx="12192000" cy="6858000"/>
   <p:notesSz cx="6858000" cy="9144000"/>
@@ -618,7 +629,7 @@
             <a:fld id="{B61BEF0D-F0BB-DE4B-95CE-6DB70DBA9567}" type="datetimeFigureOut">
               <a:rPr lang="en-US" dirty="0"/>
               <a:pPr/>
-              <a:t>10/31/2024</a:t>
+              <a:t>11/11/2024</a:t>
             </a:fld>
             <a:endParaRPr lang="en-US" dirty="0"/>
           </a:p>
@@ -911,7 +922,7 @@
             <a:fld id="{B61BEF0D-F0BB-DE4B-95CE-6DB70DBA9567}" type="datetimeFigureOut">
               <a:rPr lang="en-US" dirty="0"/>
               <a:pPr/>
-              <a:t>10/31/2024</a:t>
+              <a:t>11/11/2024</a:t>
             </a:fld>
             <a:endParaRPr lang="en-US" dirty="0"/>
           </a:p>
@@ -1156,7 +1167,7 @@
             <a:fld id="{B61BEF0D-F0BB-DE4B-95CE-6DB70DBA9567}" type="datetimeFigureOut">
               <a:rPr lang="en-US" dirty="0"/>
               <a:pPr/>
-              <a:t>10/31/2024</a:t>
+              <a:t>11/11/2024</a:t>
             </a:fld>
             <a:endParaRPr lang="en-US" dirty="0"/>
           </a:p>
@@ -1693,7 +1704,7 @@
             <a:fld id="{B61BEF0D-F0BB-DE4B-95CE-6DB70DBA9567}" type="datetimeFigureOut">
               <a:rPr lang="en-US" dirty="0"/>
               <a:pPr/>
-              <a:t>10/31/2024</a:t>
+              <a:t>11/11/2024</a:t>
             </a:fld>
             <a:endParaRPr lang="en-US" dirty="0"/>
           </a:p>
@@ -1938,7 +1949,7 @@
             <a:fld id="{B61BEF0D-F0BB-DE4B-95CE-6DB70DBA9567}" type="datetimeFigureOut">
               <a:rPr lang="en-US" dirty="0"/>
               <a:pPr/>
-              <a:t>10/31/2024</a:t>
+              <a:t>11/11/2024</a:t>
             </a:fld>
             <a:endParaRPr lang="en-US" dirty="0"/>
           </a:p>
@@ -2467,7 +2478,7 @@
             <a:fld id="{B61BEF0D-F0BB-DE4B-95CE-6DB70DBA9567}" type="datetimeFigureOut">
               <a:rPr lang="en-US" dirty="0"/>
               <a:pPr/>
-              <a:t>10/31/2024</a:t>
+              <a:t>11/11/2024</a:t>
             </a:fld>
             <a:endParaRPr lang="en-US" dirty="0"/>
           </a:p>
@@ -2761,7 +2772,7 @@
             <a:fld id="{B61BEF0D-F0BB-DE4B-95CE-6DB70DBA9567}" type="datetimeFigureOut">
               <a:rPr lang="en-US" dirty="0"/>
               <a:pPr/>
-              <a:t>10/31/2024</a:t>
+              <a:t>11/11/2024</a:t>
             </a:fld>
             <a:endParaRPr lang="en-US" dirty="0"/>
           </a:p>
@@ -2932,7 +2943,7 @@
             <a:fld id="{B61BEF0D-F0BB-DE4B-95CE-6DB70DBA9567}" type="datetimeFigureOut">
               <a:rPr lang="en-US" dirty="0"/>
               <a:pPr/>
-              <a:t>10/31/2024</a:t>
+              <a:t>11/11/2024</a:t>
             </a:fld>
             <a:endParaRPr lang="en-US" dirty="0"/>
           </a:p>
@@ -3109,7 +3120,7 @@
             <a:fld id="{B61BEF0D-F0BB-DE4B-95CE-6DB70DBA9567}" type="datetimeFigureOut">
               <a:rPr lang="en-US" dirty="0"/>
               <a:pPr/>
-              <a:t>10/31/2024</a:t>
+              <a:t>11/11/2024</a:t>
             </a:fld>
             <a:endParaRPr lang="en-US" dirty="0"/>
           </a:p>
@@ -3276,7 +3287,7 @@
             <a:fld id="{B61BEF0D-F0BB-DE4B-95CE-6DB70DBA9567}" type="datetimeFigureOut">
               <a:rPr lang="en-US" dirty="0"/>
               <a:pPr/>
-              <a:t>10/31/2024</a:t>
+              <a:t>11/11/2024</a:t>
             </a:fld>
             <a:endParaRPr lang="en-US" dirty="0"/>
           </a:p>
@@ -3524,7 +3535,7 @@
             <a:fld id="{B61BEF0D-F0BB-DE4B-95CE-6DB70DBA9567}" type="datetimeFigureOut">
               <a:rPr lang="en-US" dirty="0"/>
               <a:pPr/>
-              <a:t>10/31/2024</a:t>
+              <a:t>11/11/2024</a:t>
             </a:fld>
             <a:endParaRPr lang="en-US" dirty="0"/>
           </a:p>
@@ -3818,7 +3829,7 @@
             <a:fld id="{B61BEF0D-F0BB-DE4B-95CE-6DB70DBA9567}" type="datetimeFigureOut">
               <a:rPr lang="en-US" dirty="0"/>
               <a:pPr/>
-              <a:t>10/31/2024</a:t>
+              <a:t>11/11/2024</a:t>
             </a:fld>
             <a:endParaRPr lang="en-US" dirty="0"/>
           </a:p>
@@ -4257,7 +4268,7 @@
             <a:fld id="{B61BEF0D-F0BB-DE4B-95CE-6DB70DBA9567}" type="datetimeFigureOut">
               <a:rPr lang="en-US" dirty="0"/>
               <a:pPr/>
-              <a:t>10/31/2024</a:t>
+              <a:t>11/11/2024</a:t>
             </a:fld>
             <a:endParaRPr lang="en-US" dirty="0"/>
           </a:p>
@@ -4372,7 +4383,7 @@
             <a:fld id="{B61BEF0D-F0BB-DE4B-95CE-6DB70DBA9567}" type="datetimeFigureOut">
               <a:rPr lang="en-US" dirty="0"/>
               <a:pPr/>
-              <a:t>10/31/2024</a:t>
+              <a:t>11/11/2024</a:t>
             </a:fld>
             <a:endParaRPr lang="en-US" dirty="0"/>
           </a:p>
@@ -4464,7 +4475,7 @@
             <a:fld id="{B61BEF0D-F0BB-DE4B-95CE-6DB70DBA9567}" type="datetimeFigureOut">
               <a:rPr lang="en-US" dirty="0"/>
               <a:pPr/>
-              <a:t>10/31/2024</a:t>
+              <a:t>11/11/2024</a:t>
             </a:fld>
             <a:endParaRPr lang="en-US" dirty="0"/>
           </a:p>
@@ -4744,7 +4755,7 @@
             <a:fld id="{B61BEF0D-F0BB-DE4B-95CE-6DB70DBA9567}" type="datetimeFigureOut">
               <a:rPr lang="en-US" dirty="0"/>
               <a:pPr/>
-              <a:t>10/31/2024</a:t>
+              <a:t>11/11/2024</a:t>
             </a:fld>
             <a:endParaRPr lang="en-US" dirty="0"/>
           </a:p>
@@ -5032,7 +5043,7 @@
             <a:fld id="{B61BEF0D-F0BB-DE4B-95CE-6DB70DBA9567}" type="datetimeFigureOut">
               <a:rPr lang="en-US" dirty="0"/>
               <a:pPr/>
-              <a:t>10/31/2024</a:t>
+              <a:t>11/11/2024</a:t>
             </a:fld>
             <a:endParaRPr lang="en-US" dirty="0"/>
           </a:p>
@@ -5559,7 +5570,7 @@
             <a:fld id="{B61BEF0D-F0BB-DE4B-95CE-6DB70DBA9567}" type="datetimeFigureOut">
               <a:rPr lang="en-US" dirty="0"/>
               <a:pPr/>
-              <a:t>10/31/2024</a:t>
+              <a:t>11/11/2024</a:t>
             </a:fld>
             <a:endParaRPr lang="en-US" dirty="0"/>
           </a:p>
@@ -6104,8 +6115,8 @@
         </p:nvSpPr>
         <p:spPr>
           <a:xfrm>
-            <a:off x="1484311" y="685800"/>
-            <a:ext cx="10018713" cy="4386263"/>
+            <a:off x="1484311" y="1343025"/>
+            <a:ext cx="10018713" cy="3729038"/>
           </a:xfrm>
         </p:spPr>
         <p:txBody>
@@ -6124,6 +6135,474 @@
     <p:extLst>
       <p:ext uri="{BB962C8B-B14F-4D97-AF65-F5344CB8AC3E}">
         <p14:creationId xmlns:p14="http://schemas.microsoft.com/office/powerpoint/2010/main" val="3495238165"/>
+      </p:ext>
+    </p:extLst>
+  </p:cSld>
+  <p:clrMapOvr>
+    <a:masterClrMapping/>
+  </p:clrMapOvr>
+</p:sld>
+</file>
+
+<file path=ppt/slides/slide10.xml><?xml version="1.0" encoding="utf-8"?>
+<p:sld xmlns:a="http://schemas.openxmlformats.org/drawingml/2006/main" xmlns:r="http://schemas.openxmlformats.org/officeDocument/2006/relationships" xmlns:p="http://schemas.openxmlformats.org/presentationml/2006/main">
+  <p:cSld>
+    <p:spTree>
+      <p:nvGrpSpPr>
+        <p:cNvPr id="1" name=""/>
+        <p:cNvGrpSpPr/>
+        <p:nvPr/>
+      </p:nvGrpSpPr>
+      <p:grpSpPr>
+        <a:xfrm>
+          <a:off x="0" y="0"/>
+          <a:ext cx="0" cy="0"/>
+          <a:chOff x="0" y="0"/>
+          <a:chExt cx="0" cy="0"/>
+        </a:xfrm>
+      </p:grpSpPr>
+      <p:sp>
+        <p:nvSpPr>
+          <p:cNvPr id="3" name="Text Placeholder 2">
+            <a:extLst>
+              <a:ext uri="{FF2B5EF4-FFF2-40B4-BE49-F238E27FC236}">
+                <a16:creationId xmlns:a16="http://schemas.microsoft.com/office/drawing/2014/main" id="{EA41212D-D771-2083-13A0-E4BDC153CED3}"/>
+              </a:ext>
+            </a:extLst>
+          </p:cNvPr>
+          <p:cNvSpPr>
+            <a:spLocks noGrp="1"/>
+          </p:cNvSpPr>
+          <p:nvPr>
+            <p:ph type="body" idx="1"/>
+          </p:nvPr>
+        </p:nvSpPr>
+        <p:spPr>
+          <a:xfrm>
+            <a:off x="1484312" y="1743076"/>
+            <a:ext cx="10018713" cy="3843338"/>
+          </a:xfrm>
+        </p:spPr>
+        <p:txBody>
+          <a:bodyPr>
+            <a:normAutofit/>
+          </a:bodyPr>
+          <a:lstStyle/>
+          <a:p>
+            <a:r>
+              <a:rPr lang="en-US" sz="2800" dirty="0"/>
+              <a:t>When we are in the office, we always keep our mobile phone in the silent mode , because if we don’t keep that in the silent mode and the phone is ringing that disturb other people in the office , so always keep mobile in the silent mode. If there is a not urgent call then we avoid to take call. </a:t>
+            </a:r>
+            <a:endParaRPr lang="en-IN" sz="2800" dirty="0"/>
+          </a:p>
+        </p:txBody>
+      </p:sp>
+    </p:spTree>
+    <p:extLst>
+      <p:ext uri="{BB962C8B-B14F-4D97-AF65-F5344CB8AC3E}">
+        <p14:creationId xmlns:p14="http://schemas.microsoft.com/office/powerpoint/2010/main" val="3231888464"/>
+      </p:ext>
+    </p:extLst>
+  </p:cSld>
+  <p:clrMapOvr>
+    <a:masterClrMapping/>
+  </p:clrMapOvr>
+</p:sld>
+</file>
+
+<file path=ppt/slides/slide11.xml><?xml version="1.0" encoding="utf-8"?>
+<p:sld xmlns:a="http://schemas.openxmlformats.org/drawingml/2006/main" xmlns:r="http://schemas.openxmlformats.org/officeDocument/2006/relationships" xmlns:p="http://schemas.openxmlformats.org/presentationml/2006/main">
+  <p:cSld>
+    <p:spTree>
+      <p:nvGrpSpPr>
+        <p:cNvPr id="1" name=""/>
+        <p:cNvGrpSpPr/>
+        <p:nvPr/>
+      </p:nvGrpSpPr>
+      <p:grpSpPr>
+        <a:xfrm>
+          <a:off x="0" y="0"/>
+          <a:ext cx="0" cy="0"/>
+          <a:chOff x="0" y="0"/>
+          <a:chExt cx="0" cy="0"/>
+        </a:xfrm>
+      </p:grpSpPr>
+      <p:sp>
+        <p:nvSpPr>
+          <p:cNvPr id="2" name="Title 1">
+            <a:extLst>
+              <a:ext uri="{FF2B5EF4-FFF2-40B4-BE49-F238E27FC236}">
+                <a16:creationId xmlns:a16="http://schemas.microsoft.com/office/drawing/2014/main" id="{9CD5A898-AA43-4410-1834-FEC4E40456B9}"/>
+              </a:ext>
+            </a:extLst>
+          </p:cNvPr>
+          <p:cNvSpPr>
+            <a:spLocks noGrp="1"/>
+          </p:cNvSpPr>
+          <p:nvPr>
+            <p:ph type="title"/>
+          </p:nvPr>
+        </p:nvSpPr>
+        <p:spPr>
+          <a:xfrm>
+            <a:off x="1341436" y="128588"/>
+            <a:ext cx="10018713" cy="1228726"/>
+          </a:xfrm>
+        </p:spPr>
+        <p:txBody>
+          <a:bodyPr>
+            <a:normAutofit/>
+          </a:bodyPr>
+          <a:lstStyle/>
+          <a:p>
+            <a:r>
+              <a:rPr lang="en-US" sz="3600" b="1" u="sng" dirty="0"/>
+              <a:t>Team work</a:t>
+            </a:r>
+            <a:endParaRPr lang="en-IN" sz="3600" b="1" u="sng" dirty="0"/>
+          </a:p>
+        </p:txBody>
+      </p:sp>
+      <p:pic>
+        <p:nvPicPr>
+          <p:cNvPr id="4" name="Picture 3">
+            <a:extLst>
+              <a:ext uri="{FF2B5EF4-FFF2-40B4-BE49-F238E27FC236}">
+                <a16:creationId xmlns:a16="http://schemas.microsoft.com/office/drawing/2014/main" id="{C72260C3-0990-A02E-B837-7E666754B615}"/>
+              </a:ext>
+            </a:extLst>
+          </p:cNvPr>
+          <p:cNvPicPr>
+            <a:picLocks noChangeAspect="1"/>
+          </p:cNvPicPr>
+          <p:nvPr/>
+        </p:nvPicPr>
+        <p:blipFill>
+          <a:blip r:embed="rId2"/>
+          <a:stretch>
+            <a:fillRect/>
+          </a:stretch>
+        </p:blipFill>
+        <p:spPr>
+          <a:xfrm>
+            <a:off x="3086101" y="1645263"/>
+            <a:ext cx="7086984" cy="4726963"/>
+          </a:xfrm>
+          <a:prstGeom prst="rect">
+            <a:avLst/>
+          </a:prstGeom>
+        </p:spPr>
+      </p:pic>
+    </p:spTree>
+    <p:extLst>
+      <p:ext uri="{BB962C8B-B14F-4D97-AF65-F5344CB8AC3E}">
+        <p14:creationId xmlns:p14="http://schemas.microsoft.com/office/powerpoint/2010/main" val="1244712330"/>
+      </p:ext>
+    </p:extLst>
+  </p:cSld>
+  <p:clrMapOvr>
+    <a:masterClrMapping/>
+  </p:clrMapOvr>
+</p:sld>
+</file>
+
+<file path=ppt/slides/slide12.xml><?xml version="1.0" encoding="utf-8"?>
+<p:sld xmlns:a="http://schemas.openxmlformats.org/drawingml/2006/main" xmlns:r="http://schemas.openxmlformats.org/officeDocument/2006/relationships" xmlns:p="http://schemas.openxmlformats.org/presentationml/2006/main">
+  <p:cSld>
+    <p:spTree>
+      <p:nvGrpSpPr>
+        <p:cNvPr id="1" name=""/>
+        <p:cNvGrpSpPr/>
+        <p:nvPr/>
+      </p:nvGrpSpPr>
+      <p:grpSpPr>
+        <a:xfrm>
+          <a:off x="0" y="0"/>
+          <a:ext cx="0" cy="0"/>
+          <a:chOff x="0" y="0"/>
+          <a:chExt cx="0" cy="0"/>
+        </a:xfrm>
+      </p:grpSpPr>
+      <p:sp>
+        <p:nvSpPr>
+          <p:cNvPr id="3" name="Text Placeholder 2">
+            <a:extLst>
+              <a:ext uri="{FF2B5EF4-FFF2-40B4-BE49-F238E27FC236}">
+                <a16:creationId xmlns:a16="http://schemas.microsoft.com/office/drawing/2014/main" id="{31E129D3-28EB-8B12-6CF5-7D1BCF7AC90A}"/>
+              </a:ext>
+            </a:extLst>
+          </p:cNvPr>
+          <p:cNvSpPr>
+            <a:spLocks noGrp="1"/>
+          </p:cNvSpPr>
+          <p:nvPr>
+            <p:ph type="body" idx="1"/>
+          </p:nvPr>
+        </p:nvSpPr>
+        <p:spPr>
+          <a:xfrm>
+            <a:off x="1484312" y="1485900"/>
+            <a:ext cx="10018713" cy="4000500"/>
+          </a:xfrm>
+        </p:spPr>
+        <p:txBody>
+          <a:bodyPr>
+            <a:normAutofit/>
+          </a:bodyPr>
+          <a:lstStyle/>
+          <a:p>
+            <a:r>
+              <a:rPr lang="en-US" sz="2800" dirty="0"/>
+              <a:t>In the corporate office multiple project will working at the same time. Many people work in the same projects , so we work in a team. When we work in the team, we always give respect to other team members. Always respect to every member opinion. </a:t>
+            </a:r>
+            <a:endParaRPr lang="en-IN" sz="2800" dirty="0"/>
+          </a:p>
+        </p:txBody>
+      </p:sp>
+    </p:spTree>
+    <p:extLst>
+      <p:ext uri="{BB962C8B-B14F-4D97-AF65-F5344CB8AC3E}">
+        <p14:creationId xmlns:p14="http://schemas.microsoft.com/office/powerpoint/2010/main" val="1894177901"/>
+      </p:ext>
+    </p:extLst>
+  </p:cSld>
+  <p:clrMapOvr>
+    <a:masterClrMapping/>
+  </p:clrMapOvr>
+</p:sld>
+</file>
+
+<file path=ppt/slides/slide13.xml><?xml version="1.0" encoding="utf-8"?>
+<p:sld xmlns:a="http://schemas.openxmlformats.org/drawingml/2006/main" xmlns:r="http://schemas.openxmlformats.org/officeDocument/2006/relationships" xmlns:p="http://schemas.openxmlformats.org/presentationml/2006/main">
+  <p:cSld>
+    <p:spTree>
+      <p:nvGrpSpPr>
+        <p:cNvPr id="1" name=""/>
+        <p:cNvGrpSpPr/>
+        <p:nvPr/>
+      </p:nvGrpSpPr>
+      <p:grpSpPr>
+        <a:xfrm>
+          <a:off x="0" y="0"/>
+          <a:ext cx="0" cy="0"/>
+          <a:chOff x="0" y="0"/>
+          <a:chExt cx="0" cy="0"/>
+        </a:xfrm>
+      </p:grpSpPr>
+      <p:sp>
+        <p:nvSpPr>
+          <p:cNvPr id="2" name="Title 1">
+            <a:extLst>
+              <a:ext uri="{FF2B5EF4-FFF2-40B4-BE49-F238E27FC236}">
+                <a16:creationId xmlns:a16="http://schemas.microsoft.com/office/drawing/2014/main" id="{200C99FA-18B9-6B0C-EABD-9EEF643AC2FD}"/>
+              </a:ext>
+            </a:extLst>
+          </p:cNvPr>
+          <p:cNvSpPr>
+            <a:spLocks noGrp="1"/>
+          </p:cNvSpPr>
+          <p:nvPr>
+            <p:ph type="title"/>
+          </p:nvPr>
+        </p:nvSpPr>
+        <p:spPr>
+          <a:xfrm>
+            <a:off x="1484311" y="300038"/>
+            <a:ext cx="10018713" cy="857251"/>
+          </a:xfrm>
+        </p:spPr>
+        <p:txBody>
+          <a:bodyPr>
+            <a:normAutofit/>
+          </a:bodyPr>
+          <a:lstStyle/>
+          <a:p>
+            <a:r>
+              <a:rPr lang="en-US" sz="3600" b="1" u="sng" dirty="0"/>
+              <a:t>Meeting</a:t>
+            </a:r>
+            <a:endParaRPr lang="en-IN" sz="3600" b="1" u="sng" dirty="0"/>
+          </a:p>
+        </p:txBody>
+      </p:sp>
+      <p:pic>
+        <p:nvPicPr>
+          <p:cNvPr id="4" name="Picture 3">
+            <a:extLst>
+              <a:ext uri="{FF2B5EF4-FFF2-40B4-BE49-F238E27FC236}">
+                <a16:creationId xmlns:a16="http://schemas.microsoft.com/office/drawing/2014/main" id="{1316B4B0-DF55-7FDB-BFDF-08F97FE2AB87}"/>
+              </a:ext>
+            </a:extLst>
+          </p:cNvPr>
+          <p:cNvPicPr>
+            <a:picLocks noChangeAspect="1"/>
+          </p:cNvPicPr>
+          <p:nvPr/>
+        </p:nvPicPr>
+        <p:blipFill>
+          <a:blip r:embed="rId2"/>
+          <a:stretch>
+            <a:fillRect/>
+          </a:stretch>
+        </p:blipFill>
+        <p:spPr>
+          <a:xfrm>
+            <a:off x="3086101" y="1717675"/>
+            <a:ext cx="6853236" cy="4568824"/>
+          </a:xfrm>
+          <a:prstGeom prst="rect">
+            <a:avLst/>
+          </a:prstGeom>
+        </p:spPr>
+      </p:pic>
+    </p:spTree>
+    <p:extLst>
+      <p:ext uri="{BB962C8B-B14F-4D97-AF65-F5344CB8AC3E}">
+        <p14:creationId xmlns:p14="http://schemas.microsoft.com/office/powerpoint/2010/main" val="4115537176"/>
+      </p:ext>
+    </p:extLst>
+  </p:cSld>
+  <p:clrMapOvr>
+    <a:masterClrMapping/>
+  </p:clrMapOvr>
+</p:sld>
+</file>
+
+<file path=ppt/slides/slide14.xml><?xml version="1.0" encoding="utf-8"?>
+<p:sld xmlns:a="http://schemas.openxmlformats.org/drawingml/2006/main" xmlns:r="http://schemas.openxmlformats.org/officeDocument/2006/relationships" xmlns:p="http://schemas.openxmlformats.org/presentationml/2006/main">
+  <p:cSld>
+    <p:spTree>
+      <p:nvGrpSpPr>
+        <p:cNvPr id="1" name=""/>
+        <p:cNvGrpSpPr/>
+        <p:nvPr/>
+      </p:nvGrpSpPr>
+      <p:grpSpPr>
+        <a:xfrm>
+          <a:off x="0" y="0"/>
+          <a:ext cx="0" cy="0"/>
+          <a:chOff x="0" y="0"/>
+          <a:chExt cx="0" cy="0"/>
+        </a:xfrm>
+      </p:grpSpPr>
+      <p:sp>
+        <p:nvSpPr>
+          <p:cNvPr id="3" name="Text Placeholder 2">
+            <a:extLst>
+              <a:ext uri="{FF2B5EF4-FFF2-40B4-BE49-F238E27FC236}">
+                <a16:creationId xmlns:a16="http://schemas.microsoft.com/office/drawing/2014/main" id="{0B7855D3-6B8D-EEF6-62F0-D96042B48135}"/>
+              </a:ext>
+            </a:extLst>
+          </p:cNvPr>
+          <p:cNvSpPr>
+            <a:spLocks noGrp="1"/>
+          </p:cNvSpPr>
+          <p:nvPr>
+            <p:ph type="body" idx="1"/>
+          </p:nvPr>
+        </p:nvSpPr>
+        <p:spPr>
+          <a:xfrm>
+            <a:off x="1484312" y="1528763"/>
+            <a:ext cx="10018713" cy="4243387"/>
+          </a:xfrm>
+        </p:spPr>
+        <p:txBody>
+          <a:bodyPr>
+            <a:normAutofit/>
+          </a:bodyPr>
+          <a:lstStyle/>
+          <a:p>
+            <a:r>
+              <a:rPr lang="en-US" sz="2800" dirty="0"/>
+              <a:t>In the corporate office there are organize meeting at every weekend or month-end. In these meeting we discuss that what can we do in a last week or a month. Also ,the host of the meeting will discuss that what we do in a next week or month so we attend the meeting and listening all the instruction very carefully. Always keep a note-pen because if some most important point are discussed then we can note it. </a:t>
+            </a:r>
+            <a:endParaRPr lang="en-IN" sz="2800" dirty="0"/>
+          </a:p>
+        </p:txBody>
+      </p:sp>
+    </p:spTree>
+    <p:extLst>
+      <p:ext uri="{BB962C8B-B14F-4D97-AF65-F5344CB8AC3E}">
+        <p14:creationId xmlns:p14="http://schemas.microsoft.com/office/powerpoint/2010/main" val="2294916160"/>
+      </p:ext>
+    </p:extLst>
+  </p:cSld>
+  <p:clrMapOvr>
+    <a:masterClrMapping/>
+  </p:clrMapOvr>
+</p:sld>
+</file>
+
+<file path=ppt/slides/slide15.xml><?xml version="1.0" encoding="utf-8"?>
+<p:sld xmlns:a="http://schemas.openxmlformats.org/drawingml/2006/main" xmlns:r="http://schemas.openxmlformats.org/officeDocument/2006/relationships" xmlns:p="http://schemas.openxmlformats.org/presentationml/2006/main">
+  <p:cSld>
+    <p:spTree>
+      <p:nvGrpSpPr>
+        <p:cNvPr id="1" name=""/>
+        <p:cNvGrpSpPr/>
+        <p:nvPr/>
+      </p:nvGrpSpPr>
+      <p:grpSpPr>
+        <a:xfrm>
+          <a:off x="0" y="0"/>
+          <a:ext cx="0" cy="0"/>
+          <a:chOff x="0" y="0"/>
+          <a:chExt cx="0" cy="0"/>
+        </a:xfrm>
+      </p:grpSpPr>
+      <p:sp>
+        <p:nvSpPr>
+          <p:cNvPr id="3" name="Text Placeholder 2">
+            <a:extLst>
+              <a:ext uri="{FF2B5EF4-FFF2-40B4-BE49-F238E27FC236}">
+                <a16:creationId xmlns:a16="http://schemas.microsoft.com/office/drawing/2014/main" id="{A72CDD16-0BB3-A8A0-F600-2C587F416F27}"/>
+              </a:ext>
+            </a:extLst>
+          </p:cNvPr>
+          <p:cNvSpPr>
+            <a:spLocks noGrp="1"/>
+          </p:cNvSpPr>
+          <p:nvPr>
+            <p:ph type="body" idx="1"/>
+          </p:nvPr>
+        </p:nvSpPr>
+        <p:spPr>
+          <a:xfrm>
+            <a:off x="1484312" y="1228725"/>
+            <a:ext cx="10018713" cy="4562475"/>
+          </a:xfrm>
+        </p:spPr>
+        <p:txBody>
+          <a:bodyPr>
+            <a:normAutofit/>
+          </a:bodyPr>
+          <a:lstStyle/>
+          <a:p>
+            <a:r>
+              <a:rPr lang="en-US" sz="2800" dirty="0"/>
+              <a:t>So, all these things always follow in a corporate life.</a:t>
+            </a:r>
+          </a:p>
+          <a:p>
+            <a:endParaRPr lang="en-US" sz="2800" dirty="0"/>
+          </a:p>
+          <a:p>
+            <a:endParaRPr lang="en-US" sz="2800" dirty="0"/>
+          </a:p>
+          <a:p>
+            <a:r>
+              <a:rPr lang="en-US" sz="2800" dirty="0"/>
+              <a:t>Thank you</a:t>
+            </a:r>
+            <a:endParaRPr lang="en-IN" sz="2800" dirty="0"/>
+          </a:p>
+        </p:txBody>
+      </p:sp>
+    </p:spTree>
+    <p:extLst>
+      <p:ext uri="{BB962C8B-B14F-4D97-AF65-F5344CB8AC3E}">
+        <p14:creationId xmlns:p14="http://schemas.microsoft.com/office/powerpoint/2010/main" val="3001922616"/>
       </p:ext>
     </p:extLst>
   </p:cSld>
@@ -6150,48 +6629,12 @@
           <a:chExt cx="0" cy="0"/>
         </a:xfrm>
       </p:grpSpPr>
-      <p:sp>
-        <p:nvSpPr>
-          <p:cNvPr id="2" name="Title 1">
+      <p:pic>
+        <p:nvPicPr>
+          <p:cNvPr id="3" name="Picture 2">
             <a:extLst>
               <a:ext uri="{FF2B5EF4-FFF2-40B4-BE49-F238E27FC236}">
-                <a16:creationId xmlns:a16="http://schemas.microsoft.com/office/drawing/2014/main" id="{AE899C30-5453-04BD-A732-83132049B002}"/>
-              </a:ext>
-            </a:extLst>
-          </p:cNvPr>
-          <p:cNvSpPr>
-            <a:spLocks noGrp="1"/>
-          </p:cNvSpPr>
-          <p:nvPr>
-            <p:ph type="ctrTitle"/>
-          </p:nvPr>
-        </p:nvSpPr>
-        <p:spPr>
-          <a:xfrm>
-            <a:off x="2928401" y="1380069"/>
-            <a:ext cx="5829837" cy="148694"/>
-          </a:xfrm>
-        </p:spPr>
-        <p:txBody>
-          <a:bodyPr>
-            <a:normAutofit fontScale="90000"/>
-          </a:bodyPr>
-          <a:lstStyle/>
-          <a:p>
-            <a:r>
-              <a:rPr lang="en-US" dirty="0"/>
-              <a:t>Aptitude test</a:t>
-            </a:r>
-            <a:endParaRPr lang="en-IN" dirty="0"/>
-          </a:p>
-        </p:txBody>
-      </p:sp>
-      <p:pic>
-        <p:nvPicPr>
-          <p:cNvPr id="5" name="Picture 4">
-            <a:extLst>
-              <a:ext uri="{FF2B5EF4-FFF2-40B4-BE49-F238E27FC236}">
-                <a16:creationId xmlns:a16="http://schemas.microsoft.com/office/drawing/2014/main" id="{A8F015BB-9631-EF6C-D245-0FB357A9E091}"/>
+                <a16:creationId xmlns:a16="http://schemas.microsoft.com/office/drawing/2014/main" id="{8195EB56-7D03-55E8-9296-E9130B107451}"/>
               </a:ext>
             </a:extLst>
           </p:cNvPr>
@@ -6208,8 +6651,8 @@
         </p:blipFill>
         <p:spPr>
           <a:xfrm>
-            <a:off x="5171240" y="1737256"/>
-            <a:ext cx="3946565" cy="4614863"/>
+            <a:off x="2634854" y="1285875"/>
+            <a:ext cx="8180809" cy="4271963"/>
           </a:xfrm>
           <a:prstGeom prst="rect">
             <a:avLst/>
@@ -6219,7 +6662,7 @@
     </p:spTree>
     <p:extLst>
       <p:ext uri="{BB962C8B-B14F-4D97-AF65-F5344CB8AC3E}">
-        <p14:creationId xmlns:p14="http://schemas.microsoft.com/office/powerpoint/2010/main" val="3762391456"/>
+        <p14:creationId xmlns:p14="http://schemas.microsoft.com/office/powerpoint/2010/main" val="1322623149"/>
       </p:ext>
     </p:extLst>
   </p:cSld>
@@ -6248,10 +6691,10 @@
       </p:grpSpPr>
       <p:sp>
         <p:nvSpPr>
-          <p:cNvPr id="2" name="Title 1">
+          <p:cNvPr id="3" name="Text Placeholder 2">
             <a:extLst>
               <a:ext uri="{FF2B5EF4-FFF2-40B4-BE49-F238E27FC236}">
-                <a16:creationId xmlns:a16="http://schemas.microsoft.com/office/drawing/2014/main" id="{83DA089B-8764-6183-6D38-CE7888429671}"/>
+                <a16:creationId xmlns:a16="http://schemas.microsoft.com/office/drawing/2014/main" id="{5D16E066-F2B5-14F3-FEBB-48802C1CBB7D}"/>
               </a:ext>
             </a:extLst>
           </p:cNvPr>
@@ -6259,122 +6702,39 @@
             <a:spLocks noGrp="1"/>
           </p:cNvSpPr>
           <p:nvPr>
-            <p:ph type="title"/>
+            <p:ph type="body" idx="1"/>
           </p:nvPr>
         </p:nvSpPr>
         <p:spPr>
           <a:xfrm>
-            <a:off x="1484312" y="685800"/>
-            <a:ext cx="10018711" cy="485775"/>
+            <a:off x="1484312" y="871538"/>
+            <a:ext cx="10018713" cy="4919662"/>
           </a:xfrm>
         </p:spPr>
         <p:txBody>
           <a:bodyPr>
-            <a:normAutofit fontScale="90000"/>
+            <a:normAutofit/>
           </a:bodyPr>
           <a:lstStyle/>
           <a:p>
             <a:r>
-              <a:rPr lang="en-US" b="1" u="sng" dirty="0"/>
-              <a:t>Corporate culture:</a:t>
-            </a:r>
-            <a:endParaRPr lang="en-IN" b="1" u="sng" dirty="0"/>
-          </a:p>
-        </p:txBody>
-      </p:sp>
-      <p:sp>
-        <p:nvSpPr>
-          <p:cNvPr id="3" name="Text Placeholder 2">
-            <a:extLst>
-              <a:ext uri="{FF2B5EF4-FFF2-40B4-BE49-F238E27FC236}">
-                <a16:creationId xmlns:a16="http://schemas.microsoft.com/office/drawing/2014/main" id="{A81B49C7-601B-C8CB-E005-AF89E6BDC0EA}"/>
-              </a:ext>
-            </a:extLst>
-          </p:cNvPr>
-          <p:cNvSpPr>
-            <a:spLocks noGrp="1"/>
-          </p:cNvSpPr>
-          <p:nvPr>
-            <p:ph type="body" idx="1"/>
-          </p:nvPr>
-        </p:nvSpPr>
-        <p:spPr>
-          <a:xfrm>
-            <a:off x="1484312" y="1714500"/>
-            <a:ext cx="10018713" cy="4076700"/>
-          </a:xfrm>
-        </p:spPr>
-        <p:txBody>
-          <a:bodyPr>
-            <a:normAutofit lnSpcReduction="10000"/>
-          </a:bodyPr>
-          <a:lstStyle/>
-          <a:p>
-            <a:pPr marL="342900" indent="-342900">
-              <a:buFont typeface="Wingdings" panose="05000000000000000000" pitchFamily="2" charset="2"/>
-              <a:buChar char="Ø"/>
-            </a:pPr>
-            <a:r>
-              <a:rPr lang="en-US" sz="2800" dirty="0"/>
-              <a:t> In corporate culture many thing will be important.</a:t>
-            </a:r>
-          </a:p>
-          <a:p>
-            <a:pPr marL="342900" indent="-342900">
-              <a:buFont typeface="Wingdings" panose="05000000000000000000" pitchFamily="2" charset="2"/>
-              <a:buChar char="Ø"/>
-            </a:pPr>
-            <a:r>
-              <a:rPr lang="en-US" sz="2800" dirty="0"/>
-              <a:t> when we enter in corporate culture the first important thing is our first impression.</a:t>
-            </a:r>
-          </a:p>
-          <a:p>
-            <a:pPr marL="342900" indent="-342900">
-              <a:buFont typeface="Wingdings" panose="05000000000000000000" pitchFamily="2" charset="2"/>
-              <a:buChar char="Ø"/>
-            </a:pPr>
-            <a:r>
-              <a:rPr lang="en-US" sz="2800" dirty="0"/>
-              <a:t> There are many ways to make our first impression good in other people mind.</a:t>
-            </a:r>
-          </a:p>
-          <a:p>
-            <a:pPr marL="342900" indent="-342900">
-              <a:buFont typeface="Wingdings" panose="05000000000000000000" pitchFamily="2" charset="2"/>
-              <a:buChar char="Ø"/>
-            </a:pPr>
-            <a:r>
-              <a:rPr lang="en-US" sz="2800" dirty="0"/>
-              <a:t> we always wear a clean and iron clothes.</a:t>
-            </a:r>
-          </a:p>
-          <a:p>
-            <a:pPr marL="342900" indent="-342900">
-              <a:buFont typeface="Wingdings" panose="05000000000000000000" pitchFamily="2" charset="2"/>
-              <a:buChar char="Ø"/>
-            </a:pPr>
-            <a:r>
-              <a:rPr lang="en-US" sz="2800" dirty="0"/>
-              <a:t>Always wear a formal clothes with perfect color combination. </a:t>
-            </a:r>
-          </a:p>
-          <a:p>
-            <a:pPr marL="342900" indent="-342900">
-              <a:buFont typeface="Wingdings" panose="05000000000000000000" pitchFamily="2" charset="2"/>
-              <a:buChar char="Ø"/>
-            </a:pPr>
-            <a:r>
-              <a:rPr lang="en-US" sz="2800" dirty="0"/>
-              <a:t>Always use perfume that attract people.</a:t>
-            </a:r>
+              <a:rPr lang="en-US" sz="3200" dirty="0"/>
+              <a:t>In corporate culture many things will be important , that we must follow in a corporate office.</a:t>
+            </a:r>
+          </a:p>
+          <a:p>
+            <a:r>
+              <a:rPr lang="en-US" sz="3200" dirty="0"/>
+              <a:t>So , lets understand that things.</a:t>
+            </a:r>
+            <a:endParaRPr lang="en-IN" sz="3200" dirty="0"/>
           </a:p>
         </p:txBody>
       </p:sp>
     </p:spTree>
     <p:extLst>
       <p:ext uri="{BB962C8B-B14F-4D97-AF65-F5344CB8AC3E}">
-        <p14:creationId xmlns:p14="http://schemas.microsoft.com/office/powerpoint/2010/main" val="868101152"/>
+        <p14:creationId xmlns:p14="http://schemas.microsoft.com/office/powerpoint/2010/main" val="1667283277"/>
       </p:ext>
     </p:extLst>
   </p:cSld>
@@ -6403,10 +6763,104 @@
       </p:grpSpPr>
       <p:sp>
         <p:nvSpPr>
+          <p:cNvPr id="2" name="Title 1">
+            <a:extLst>
+              <a:ext uri="{FF2B5EF4-FFF2-40B4-BE49-F238E27FC236}">
+                <a16:creationId xmlns:a16="http://schemas.microsoft.com/office/drawing/2014/main" id="{65A8B41E-9996-1A1E-97E8-8C56780817E1}"/>
+              </a:ext>
+            </a:extLst>
+          </p:cNvPr>
+          <p:cNvSpPr>
+            <a:spLocks noGrp="1"/>
+          </p:cNvSpPr>
+          <p:nvPr>
+            <p:ph type="title"/>
+          </p:nvPr>
+        </p:nvSpPr>
+        <p:spPr>
+          <a:xfrm>
+            <a:off x="3657599" y="1"/>
+            <a:ext cx="5200651" cy="2514600"/>
+          </a:xfrm>
+        </p:spPr>
+        <p:txBody>
+          <a:bodyPr/>
+          <a:lstStyle/>
+          <a:p>
+            <a:r>
+              <a:rPr lang="en-US" b="1" u="sng" dirty="0"/>
+              <a:t>First impression</a:t>
+            </a:r>
+            <a:endParaRPr lang="en-IN" b="1" u="sng" dirty="0"/>
+          </a:p>
+        </p:txBody>
+      </p:sp>
+      <p:pic>
+        <p:nvPicPr>
+          <p:cNvPr id="5" name="Picture 4">
+            <a:extLst>
+              <a:ext uri="{FF2B5EF4-FFF2-40B4-BE49-F238E27FC236}">
+                <a16:creationId xmlns:a16="http://schemas.microsoft.com/office/drawing/2014/main" id="{9405291B-F401-B404-68AB-A3E9F47C0531}"/>
+              </a:ext>
+            </a:extLst>
+          </p:cNvPr>
+          <p:cNvPicPr>
+            <a:picLocks noChangeAspect="1"/>
+          </p:cNvPicPr>
+          <p:nvPr/>
+        </p:nvPicPr>
+        <p:blipFill>
+          <a:blip r:embed="rId2"/>
+          <a:stretch>
+            <a:fillRect/>
+          </a:stretch>
+        </p:blipFill>
+        <p:spPr>
+          <a:xfrm>
+            <a:off x="2681949" y="2367601"/>
+            <a:ext cx="7133564" cy="3633151"/>
+          </a:xfrm>
+          <a:prstGeom prst="rect">
+            <a:avLst/>
+          </a:prstGeom>
+        </p:spPr>
+      </p:pic>
+    </p:spTree>
+    <p:extLst>
+      <p:ext uri="{BB962C8B-B14F-4D97-AF65-F5344CB8AC3E}">
+        <p14:creationId xmlns:p14="http://schemas.microsoft.com/office/powerpoint/2010/main" val="148519615"/>
+      </p:ext>
+    </p:extLst>
+  </p:cSld>
+  <p:clrMapOvr>
+    <a:masterClrMapping/>
+  </p:clrMapOvr>
+</p:sld>
+</file>
+
+<file path=ppt/slides/slide5.xml><?xml version="1.0" encoding="utf-8"?>
+<p:sld xmlns:a="http://schemas.openxmlformats.org/drawingml/2006/main" xmlns:r="http://schemas.openxmlformats.org/officeDocument/2006/relationships" xmlns:p="http://schemas.openxmlformats.org/presentationml/2006/main">
+  <p:cSld>
+    <p:spTree>
+      <p:nvGrpSpPr>
+        <p:cNvPr id="1" name=""/>
+        <p:cNvGrpSpPr/>
+        <p:nvPr/>
+      </p:nvGrpSpPr>
+      <p:grpSpPr>
+        <a:xfrm>
+          <a:off x="0" y="0"/>
+          <a:ext cx="0" cy="0"/>
+          <a:chOff x="0" y="0"/>
+          <a:chExt cx="0" cy="0"/>
+        </a:xfrm>
+      </p:grpSpPr>
+      <p:sp>
+        <p:nvSpPr>
           <p:cNvPr id="3" name="Text Placeholder 2">
             <a:extLst>
               <a:ext uri="{FF2B5EF4-FFF2-40B4-BE49-F238E27FC236}">
-                <a16:creationId xmlns:a16="http://schemas.microsoft.com/office/drawing/2014/main" id="{DD6C19E4-A6B6-2B39-B70D-D631F6F6D267}"/>
+                <a16:creationId xmlns:a16="http://schemas.microsoft.com/office/drawing/2014/main" id="{1A588367-D1D0-0E54-6FD8-346772C93312}"/>
               </a:ext>
             </a:extLst>
           </p:cNvPr>
@@ -6419,74 +6873,352 @@
         </p:nvSpPr>
         <p:spPr>
           <a:xfrm>
-            <a:off x="1484312" y="714375"/>
-            <a:ext cx="10018713" cy="5076825"/>
+            <a:off x="1484312" y="1571626"/>
+            <a:ext cx="10018713" cy="3957637"/>
           </a:xfrm>
         </p:spPr>
         <p:txBody>
-          <a:bodyPr/>
+          <a:bodyPr>
+            <a:normAutofit/>
+          </a:bodyPr>
           <a:lstStyle/>
           <a:p>
-            <a:pPr marL="342900" indent="-342900">
-              <a:buFont typeface="Wingdings" panose="05000000000000000000" pitchFamily="2" charset="2"/>
-              <a:buChar char="Ø"/>
-            </a:pPr>
             <a:r>
               <a:rPr lang="en-US" sz="2800" dirty="0"/>
-              <a:t> There are many more things that we must follow in corporate culture.</a:t>
-            </a:r>
-          </a:p>
-          <a:p>
-            <a:pPr marL="342900" indent="-342900">
-              <a:buFont typeface="Wingdings" panose="05000000000000000000" pitchFamily="2" charset="2"/>
-              <a:buChar char="Ø"/>
-            </a:pPr>
-            <a:r>
-              <a:rPr lang="en-US" sz="2800" dirty="0"/>
-              <a:t> We must follow office rules like keep your desktop clean, always keep mobile in vibrate or silent mode etc.</a:t>
-            </a:r>
-          </a:p>
-          <a:p>
-            <a:pPr marL="342900" indent="-342900">
-              <a:buFont typeface="Wingdings" panose="05000000000000000000" pitchFamily="2" charset="2"/>
-              <a:buChar char="Ø"/>
-            </a:pPr>
-            <a:r>
-              <a:rPr lang="en-US" sz="2800" dirty="0"/>
-              <a:t> Follow all the office rules properly is a good habit in corporate life.</a:t>
-            </a:r>
-          </a:p>
-          <a:p>
-            <a:pPr marL="342900" indent="-342900">
-              <a:buFont typeface="Wingdings" panose="05000000000000000000" pitchFamily="2" charset="2"/>
-              <a:buChar char="Ø"/>
-            </a:pPr>
-            <a:r>
-              <a:rPr lang="en-US" sz="2800" dirty="0"/>
-              <a:t> when we are working in a team then we always gave respect to other team members.</a:t>
-            </a:r>
-          </a:p>
-          <a:p>
-            <a:pPr marL="342900" indent="-342900">
-              <a:buFont typeface="Wingdings" panose="05000000000000000000" pitchFamily="2" charset="2"/>
-              <a:buChar char="Ø"/>
-            </a:pPr>
-            <a:r>
-              <a:rPr lang="en-US" sz="2800" dirty="0"/>
-              <a:t> so, these are some important things that we must  follow in our corporate life.</a:t>
-            </a:r>
-            <a:r>
-              <a:rPr lang="en-US" dirty="0"/>
-              <a:t> </a:t>
-            </a:r>
-            <a:endParaRPr lang="en-IN" dirty="0"/>
+              <a:t>When we enter in a corporate life the first important thing is our first impression. For make our first impression good we must wear a formal clothes. Always wear clean and iron clothes. Always use perfume that attract people . We must follow that thing because it impact on our first impression.</a:t>
+            </a:r>
+            <a:endParaRPr lang="en-IN" sz="2800" dirty="0"/>
           </a:p>
         </p:txBody>
       </p:sp>
     </p:spTree>
     <p:extLst>
       <p:ext uri="{BB962C8B-B14F-4D97-AF65-F5344CB8AC3E}">
-        <p14:creationId xmlns:p14="http://schemas.microsoft.com/office/powerpoint/2010/main" val="2214208612"/>
+        <p14:creationId xmlns:p14="http://schemas.microsoft.com/office/powerpoint/2010/main" val="3534079427"/>
+      </p:ext>
+    </p:extLst>
+  </p:cSld>
+  <p:clrMapOvr>
+    <a:masterClrMapping/>
+  </p:clrMapOvr>
+</p:sld>
+</file>
+
+<file path=ppt/slides/slide6.xml><?xml version="1.0" encoding="utf-8"?>
+<p:sld xmlns:a="http://schemas.openxmlformats.org/drawingml/2006/main" xmlns:r="http://schemas.openxmlformats.org/officeDocument/2006/relationships" xmlns:p="http://schemas.openxmlformats.org/presentationml/2006/main">
+  <p:cSld>
+    <p:spTree>
+      <p:nvGrpSpPr>
+        <p:cNvPr id="1" name=""/>
+        <p:cNvGrpSpPr/>
+        <p:nvPr/>
+      </p:nvGrpSpPr>
+      <p:grpSpPr>
+        <a:xfrm>
+          <a:off x="0" y="0"/>
+          <a:ext cx="0" cy="0"/>
+          <a:chOff x="0" y="0"/>
+          <a:chExt cx="0" cy="0"/>
+        </a:xfrm>
+      </p:grpSpPr>
+      <p:sp>
+        <p:nvSpPr>
+          <p:cNvPr id="3" name="Text Placeholder 2">
+            <a:extLst>
+              <a:ext uri="{FF2B5EF4-FFF2-40B4-BE49-F238E27FC236}">
+                <a16:creationId xmlns:a16="http://schemas.microsoft.com/office/drawing/2014/main" id="{68A4710E-2F8E-98BA-DFE4-28CF7FA030D5}"/>
+              </a:ext>
+            </a:extLst>
+          </p:cNvPr>
+          <p:cNvSpPr>
+            <a:spLocks noGrp="1"/>
+          </p:cNvSpPr>
+          <p:nvPr>
+            <p:ph type="body" idx="1"/>
+          </p:nvPr>
+        </p:nvSpPr>
+        <p:spPr>
+          <a:xfrm>
+            <a:off x="1484312" y="1643063"/>
+            <a:ext cx="10018713" cy="4148137"/>
+          </a:xfrm>
+        </p:spPr>
+        <p:txBody>
+          <a:bodyPr>
+            <a:normAutofit/>
+          </a:bodyPr>
+          <a:lstStyle/>
+          <a:p>
+            <a:r>
+              <a:rPr lang="en-US" sz="2800" dirty="0"/>
+              <a:t>After enter in a corporate life there are some of rules that we must follow in a corporate office. Let’s understand that rules.</a:t>
+            </a:r>
+            <a:endParaRPr lang="en-IN" sz="2800" dirty="0"/>
+          </a:p>
+        </p:txBody>
+      </p:sp>
+    </p:spTree>
+    <p:extLst>
+      <p:ext uri="{BB962C8B-B14F-4D97-AF65-F5344CB8AC3E}">
+        <p14:creationId xmlns:p14="http://schemas.microsoft.com/office/powerpoint/2010/main" val="1161457859"/>
+      </p:ext>
+    </p:extLst>
+  </p:cSld>
+  <p:clrMapOvr>
+    <a:masterClrMapping/>
+  </p:clrMapOvr>
+</p:sld>
+</file>
+
+<file path=ppt/slides/slide7.xml><?xml version="1.0" encoding="utf-8"?>
+<p:sld xmlns:a="http://schemas.openxmlformats.org/drawingml/2006/main" xmlns:r="http://schemas.openxmlformats.org/officeDocument/2006/relationships" xmlns:p="http://schemas.openxmlformats.org/presentationml/2006/main">
+  <p:cSld>
+    <p:spTree>
+      <p:nvGrpSpPr>
+        <p:cNvPr id="1" name=""/>
+        <p:cNvGrpSpPr/>
+        <p:nvPr/>
+      </p:nvGrpSpPr>
+      <p:grpSpPr>
+        <a:xfrm>
+          <a:off x="0" y="0"/>
+          <a:ext cx="0" cy="0"/>
+          <a:chOff x="0" y="0"/>
+          <a:chExt cx="0" cy="0"/>
+        </a:xfrm>
+      </p:grpSpPr>
+      <p:sp>
+        <p:nvSpPr>
+          <p:cNvPr id="2" name="Title 1">
+            <a:extLst>
+              <a:ext uri="{FF2B5EF4-FFF2-40B4-BE49-F238E27FC236}">
+                <a16:creationId xmlns:a16="http://schemas.microsoft.com/office/drawing/2014/main" id="{0C52AAB7-4431-4479-1E9A-1F68D658AF98}"/>
+              </a:ext>
+            </a:extLst>
+          </p:cNvPr>
+          <p:cNvSpPr>
+            <a:spLocks noGrp="1"/>
+          </p:cNvSpPr>
+          <p:nvPr>
+            <p:ph type="title"/>
+          </p:nvPr>
+        </p:nvSpPr>
+        <p:spPr>
+          <a:xfrm>
+            <a:off x="1512886" y="342900"/>
+            <a:ext cx="10018713" cy="1752599"/>
+          </a:xfrm>
+        </p:spPr>
+        <p:txBody>
+          <a:bodyPr>
+            <a:normAutofit/>
+          </a:bodyPr>
+          <a:lstStyle/>
+          <a:p>
+            <a:r>
+              <a:rPr lang="en-US" sz="3600" b="1" u="sng" dirty="0"/>
+              <a:t>Keep your desk always clean</a:t>
+            </a:r>
+            <a:endParaRPr lang="en-IN" sz="3600" b="1" u="sng" dirty="0"/>
+          </a:p>
+        </p:txBody>
+      </p:sp>
+      <p:pic>
+        <p:nvPicPr>
+          <p:cNvPr id="4" name="Picture 3">
+            <a:extLst>
+              <a:ext uri="{FF2B5EF4-FFF2-40B4-BE49-F238E27FC236}">
+                <a16:creationId xmlns:a16="http://schemas.microsoft.com/office/drawing/2014/main" id="{D4E2C682-84B0-0B7E-4C27-7C83C80E6D5A}"/>
+              </a:ext>
+            </a:extLst>
+          </p:cNvPr>
+          <p:cNvPicPr>
+            <a:picLocks noChangeAspect="1"/>
+          </p:cNvPicPr>
+          <p:nvPr/>
+        </p:nvPicPr>
+        <p:blipFill>
+          <a:blip r:embed="rId2"/>
+          <a:stretch>
+            <a:fillRect/>
+          </a:stretch>
+        </p:blipFill>
+        <p:spPr>
+          <a:xfrm>
+            <a:off x="3002754" y="2095499"/>
+            <a:ext cx="7038975" cy="3952875"/>
+          </a:xfrm>
+          <a:prstGeom prst="rect">
+            <a:avLst/>
+          </a:prstGeom>
+        </p:spPr>
+      </p:pic>
+    </p:spTree>
+    <p:extLst>
+      <p:ext uri="{BB962C8B-B14F-4D97-AF65-F5344CB8AC3E}">
+        <p14:creationId xmlns:p14="http://schemas.microsoft.com/office/powerpoint/2010/main" val="975071317"/>
+      </p:ext>
+    </p:extLst>
+  </p:cSld>
+  <p:clrMapOvr>
+    <a:masterClrMapping/>
+  </p:clrMapOvr>
+</p:sld>
+</file>
+
+<file path=ppt/slides/slide8.xml><?xml version="1.0" encoding="utf-8"?>
+<p:sld xmlns:a="http://schemas.openxmlformats.org/drawingml/2006/main" xmlns:r="http://schemas.openxmlformats.org/officeDocument/2006/relationships" xmlns:p="http://schemas.openxmlformats.org/presentationml/2006/main">
+  <p:cSld>
+    <p:spTree>
+      <p:nvGrpSpPr>
+        <p:cNvPr id="1" name=""/>
+        <p:cNvGrpSpPr/>
+        <p:nvPr/>
+      </p:nvGrpSpPr>
+      <p:grpSpPr>
+        <a:xfrm>
+          <a:off x="0" y="0"/>
+          <a:ext cx="0" cy="0"/>
+          <a:chOff x="0" y="0"/>
+          <a:chExt cx="0" cy="0"/>
+        </a:xfrm>
+      </p:grpSpPr>
+      <p:sp>
+        <p:nvSpPr>
+          <p:cNvPr id="3" name="Text Placeholder 2">
+            <a:extLst>
+              <a:ext uri="{FF2B5EF4-FFF2-40B4-BE49-F238E27FC236}">
+                <a16:creationId xmlns:a16="http://schemas.microsoft.com/office/drawing/2014/main" id="{BA3C00DF-93DF-76B8-7A8F-ABA444053404}"/>
+              </a:ext>
+            </a:extLst>
+          </p:cNvPr>
+          <p:cNvSpPr>
+            <a:spLocks noGrp="1"/>
+          </p:cNvSpPr>
+          <p:nvPr>
+            <p:ph type="body" idx="1"/>
+          </p:nvPr>
+        </p:nvSpPr>
+        <p:spPr>
+          <a:xfrm>
+            <a:off x="1484312" y="1557339"/>
+            <a:ext cx="10018713" cy="4143374"/>
+          </a:xfrm>
+        </p:spPr>
+        <p:txBody>
+          <a:bodyPr>
+            <a:normAutofit/>
+          </a:bodyPr>
+          <a:lstStyle/>
+          <a:p>
+            <a:r>
+              <a:rPr lang="en-US" sz="2800" dirty="0"/>
+              <a:t>In the office we always keep clean our desk. We do not put things like  pen , dairy , some other stationary item on the desk. We do not eat food on our desk . Use always dustbin for un-necessary things . Always sitting on a chair properly.</a:t>
+            </a:r>
+            <a:endParaRPr lang="en-IN" sz="2800" dirty="0"/>
+          </a:p>
+        </p:txBody>
+      </p:sp>
+    </p:spTree>
+    <p:extLst>
+      <p:ext uri="{BB962C8B-B14F-4D97-AF65-F5344CB8AC3E}">
+        <p14:creationId xmlns:p14="http://schemas.microsoft.com/office/powerpoint/2010/main" val="77493592"/>
+      </p:ext>
+    </p:extLst>
+  </p:cSld>
+  <p:clrMapOvr>
+    <a:masterClrMapping/>
+  </p:clrMapOvr>
+</p:sld>
+</file>
+
+<file path=ppt/slides/slide9.xml><?xml version="1.0" encoding="utf-8"?>
+<p:sld xmlns:a="http://schemas.openxmlformats.org/drawingml/2006/main" xmlns:r="http://schemas.openxmlformats.org/officeDocument/2006/relationships" xmlns:p="http://schemas.openxmlformats.org/presentationml/2006/main">
+  <p:cSld>
+    <p:spTree>
+      <p:nvGrpSpPr>
+        <p:cNvPr id="1" name=""/>
+        <p:cNvGrpSpPr/>
+        <p:nvPr/>
+      </p:nvGrpSpPr>
+      <p:grpSpPr>
+        <a:xfrm>
+          <a:off x="0" y="0"/>
+          <a:ext cx="0" cy="0"/>
+          <a:chOff x="0" y="0"/>
+          <a:chExt cx="0" cy="0"/>
+        </a:xfrm>
+      </p:grpSpPr>
+      <p:sp>
+        <p:nvSpPr>
+          <p:cNvPr id="2" name="Title 1">
+            <a:extLst>
+              <a:ext uri="{FF2B5EF4-FFF2-40B4-BE49-F238E27FC236}">
+                <a16:creationId xmlns:a16="http://schemas.microsoft.com/office/drawing/2014/main" id="{FFFFA8EF-D09C-4160-63E9-F3D493647DE8}"/>
+              </a:ext>
+            </a:extLst>
+          </p:cNvPr>
+          <p:cNvSpPr>
+            <a:spLocks noGrp="1"/>
+          </p:cNvSpPr>
+          <p:nvPr>
+            <p:ph type="title"/>
+          </p:nvPr>
+        </p:nvSpPr>
+        <p:spPr>
+          <a:xfrm>
+            <a:off x="1484311" y="685801"/>
+            <a:ext cx="10018713" cy="1328738"/>
+          </a:xfrm>
+        </p:spPr>
+        <p:txBody>
+          <a:bodyPr>
+            <a:normAutofit/>
+          </a:bodyPr>
+          <a:lstStyle/>
+          <a:p>
+            <a:r>
+              <a:rPr lang="en-US" sz="3600" b="1" u="sng" dirty="0"/>
+              <a:t>Always keep phone in silent mode</a:t>
+            </a:r>
+            <a:endParaRPr lang="en-IN" sz="3600" b="1" u="sng" dirty="0"/>
+          </a:p>
+        </p:txBody>
+      </p:sp>
+      <p:pic>
+        <p:nvPicPr>
+          <p:cNvPr id="4" name="Picture 3">
+            <a:extLst>
+              <a:ext uri="{FF2B5EF4-FFF2-40B4-BE49-F238E27FC236}">
+                <a16:creationId xmlns:a16="http://schemas.microsoft.com/office/drawing/2014/main" id="{3C53876B-A5EA-58FE-1484-AFC29B63560E}"/>
+              </a:ext>
+            </a:extLst>
+          </p:cNvPr>
+          <p:cNvPicPr>
+            <a:picLocks noChangeAspect="1"/>
+          </p:cNvPicPr>
+          <p:nvPr/>
+        </p:nvPicPr>
+        <p:blipFill>
+          <a:blip r:embed="rId2"/>
+          <a:stretch>
+            <a:fillRect/>
+          </a:stretch>
+        </p:blipFill>
+        <p:spPr>
+          <a:xfrm>
+            <a:off x="4279104" y="2014539"/>
+            <a:ext cx="4429125" cy="4410074"/>
+          </a:xfrm>
+          <a:prstGeom prst="rect">
+            <a:avLst/>
+          </a:prstGeom>
+        </p:spPr>
+      </p:pic>
+    </p:spTree>
+    <p:extLst>
+      <p:ext uri="{BB962C8B-B14F-4D97-AF65-F5344CB8AC3E}">
+        <p14:creationId xmlns:p14="http://schemas.microsoft.com/office/powerpoint/2010/main" val="2502110403"/>
       </p:ext>
     </p:extLst>
   </p:cSld>
